--- a/SYNAPTA_PITCH_DECK.pptx
+++ b/SYNAPTA_PITCH_DECK.pptx
@@ -3259,7 +3259,7 @@
                 </a:solidFill>
                 <a:latin typeface="Calibri"/>
               </a:rPr>
-              <a:t>sized for your infrastructure,</a:t>
+              <a:t>on a single GPU,</a:t>
             </a:r>
           </a:p>
           <a:p>
@@ -3283,7 +3283,7 @@
                 </a:solidFill>
                 <a:latin typeface="Calibri"/>
               </a:rPr>
-              <a:t>at 20× lower compute cost.</a:t>
+              <a:t>for sovereign AI.</a:t>
             </a:r>
           </a:p>
         </p:txBody>
@@ -5214,13 +5214,13 @@
           <a:p>
             <a:pPr algn="l"/>
             <a:r>
-              <a:rPr sz="3200" b="1">
+              <a:rPr sz="3000" b="1">
                 <a:solidFill>
                   <a:srgbClr val="00D4FF"/>
                 </a:solidFill>
                 <a:latin typeface="Calibri"/>
               </a:rPr>
-              <a:t>+11 to +14.5 points across reasoning benchmarks.</a:t>
+              <a:t>+6 to +20.1 points across BFSI and reasoning benchmarks.</a:t>
             </a:r>
           </a:p>
         </p:txBody>
@@ -5234,7 +5234,7 @@
         <p:spPr>
           <a:xfrm>
             <a:off x="640080" y="2560320"/>
-            <a:ext cx="3291840" cy="548640"/>
+            <a:ext cx="3108960" cy="548640"/>
           </a:xfrm>
           <a:prstGeom prst="rect">
             <a:avLst/>
@@ -5278,7 +5278,7 @@
         <p:spPr>
           <a:xfrm>
             <a:off x="822960" y="2706624"/>
-            <a:ext cx="3291840" cy="365760"/>
+            <a:ext cx="3108960" cy="365760"/>
           </a:xfrm>
           <a:prstGeom prst="rect">
             <a:avLst/>
@@ -5312,8 +5312,8 @@
         </p:nvSpPr>
         <p:spPr>
           <a:xfrm>
-            <a:off x="3931920" y="2560320"/>
-            <a:ext cx="1737360" cy="548640"/>
+            <a:off x="3749040" y="2560320"/>
+            <a:ext cx="1554480" cy="548640"/>
           </a:xfrm>
           <a:prstGeom prst="rect">
             <a:avLst/>
@@ -5356,8 +5356,8 @@
         </p:nvSpPr>
         <p:spPr>
           <a:xfrm>
-            <a:off x="4114800" y="2706624"/>
-            <a:ext cx="1737360" cy="365760"/>
+            <a:off x="3931920" y="2706624"/>
+            <a:ext cx="1554480" cy="365760"/>
           </a:xfrm>
           <a:prstGeom prst="rect">
             <a:avLst/>
@@ -5378,7 +5378,7 @@
                 </a:solidFill>
                 <a:latin typeface="Calibri"/>
               </a:rPr>
-              <a:t>ARC-Challenge</a:t>
+              <a:t>RBI Doc-QA</a:t>
             </a:r>
           </a:p>
         </p:txBody>
@@ -5391,7 +5391,7 @@
         </p:nvSpPr>
         <p:spPr>
           <a:xfrm>
-            <a:off x="5669280" y="2560320"/>
+            <a:off x="5303520" y="2560320"/>
             <a:ext cx="1737360" cy="548640"/>
           </a:xfrm>
           <a:prstGeom prst="rect">
@@ -5435,7 +5435,7 @@
         </p:nvSpPr>
         <p:spPr>
           <a:xfrm>
-            <a:off x="5852160" y="2706624"/>
+            <a:off x="5486400" y="2706624"/>
             <a:ext cx="1737360" cy="365760"/>
           </a:xfrm>
           <a:prstGeom prst="rect">
@@ -5457,7 +5457,7 @@
                 </a:solidFill>
                 <a:latin typeface="Calibri"/>
               </a:rPr>
-              <a:t>MATH-500</a:t>
+              <a:t>FinanceBench</a:t>
             </a:r>
           </a:p>
         </p:txBody>
@@ -5470,8 +5470,8 @@
         </p:nvSpPr>
         <p:spPr>
           <a:xfrm>
-            <a:off x="7406640" y="2560320"/>
-            <a:ext cx="1737360" cy="548640"/>
+            <a:off x="7040880" y="2560320"/>
+            <a:ext cx="1371600" cy="548640"/>
           </a:xfrm>
           <a:prstGeom prst="rect">
             <a:avLst/>
@@ -5514,8 +5514,8 @@
         </p:nvSpPr>
         <p:spPr>
           <a:xfrm>
-            <a:off x="7589520" y="2706624"/>
-            <a:ext cx="1737360" cy="365760"/>
+            <a:off x="7223760" y="2706624"/>
+            <a:ext cx="1371600" cy="365760"/>
           </a:xfrm>
           <a:prstGeom prst="rect">
             <a:avLst/>
@@ -5536,7 +5536,7 @@
                 </a:solidFill>
                 <a:latin typeface="Calibri"/>
               </a:rPr>
-              <a:t>HumanEval</a:t>
+              <a:t>MBPP</a:t>
             </a:r>
           </a:p>
         </p:txBody>
@@ -5549,8 +5549,8 @@
         </p:nvSpPr>
         <p:spPr>
           <a:xfrm>
-            <a:off x="9144000" y="2560320"/>
-            <a:ext cx="1737360" cy="548640"/>
+            <a:off x="8412480" y="2560320"/>
+            <a:ext cx="1554480" cy="548640"/>
           </a:xfrm>
           <a:prstGeom prst="rect">
             <a:avLst/>
@@ -5593,8 +5593,8 @@
         </p:nvSpPr>
         <p:spPr>
           <a:xfrm>
-            <a:off x="9326880" y="2706624"/>
-            <a:ext cx="1737360" cy="365760"/>
+            <a:off x="8595360" y="2706624"/>
+            <a:ext cx="1554480" cy="365760"/>
           </a:xfrm>
           <a:prstGeom prst="rect">
             <a:avLst/>
@@ -5615,7 +5615,7 @@
                 </a:solidFill>
                 <a:latin typeface="Calibri"/>
               </a:rPr>
-              <a:t>MBPP</a:t>
+              <a:t>HumanEval</a:t>
             </a:r>
           </a:p>
         </p:txBody>
@@ -5628,8 +5628,87 @@
         </p:nvSpPr>
         <p:spPr>
           <a:xfrm>
+            <a:off x="9966960" y="2560320"/>
+            <a:ext cx="1554480" cy="548640"/>
+          </a:xfrm>
+          <a:prstGeom prst="rect">
+            <a:avLst/>
+          </a:prstGeom>
+          <a:solidFill>
+            <a:srgbClr val="1C254F"/>
+          </a:solidFill>
+          <a:ln>
+            <a:noFill/>
+          </a:ln>
+          <a:effectLst/>
+        </p:spPr>
+        <p:style>
+          <a:lnRef idx="1">
+            <a:schemeClr val="accent1"/>
+          </a:lnRef>
+          <a:fillRef idx="3">
+            <a:schemeClr val="accent1"/>
+          </a:fillRef>
+          <a:effectRef idx="2">
+            <a:schemeClr val="accent1"/>
+          </a:effectRef>
+          <a:fontRef idx="minor">
+            <a:schemeClr val="lt1"/>
+          </a:fontRef>
+        </p:style>
+        <p:txBody>
+          <a:bodyPr rtlCol="0" anchor="ctr"/>
+          <a:lstStyle/>
+          <a:p>
+            <a:pPr algn="ctr"/>
+          </a:p>
+        </p:txBody>
+      </p:sp>
+      <p:sp>
+        <p:nvSpPr>
+          <p:cNvPr id="19" name="TextBox 18"/>
+          <p:cNvSpPr txBox="1"/>
+          <p:nvPr/>
+        </p:nvSpPr>
+        <p:spPr>
+          <a:xfrm>
+            <a:off x="10149840" y="2706624"/>
+            <a:ext cx="1554480" cy="365760"/>
+          </a:xfrm>
+          <a:prstGeom prst="rect">
+            <a:avLst/>
+          </a:prstGeom>
+          <a:noFill/>
+        </p:spPr>
+        <p:txBody>
+          <a:bodyPr wrap="square" lIns="0" rIns="0" tIns="0" bIns="0" anchor="t">
+            <a:spAutoFit/>
+          </a:bodyPr>
+          <a:lstStyle/>
+          <a:p>
+            <a:pPr algn="ctr"/>
+            <a:r>
+              <a:rPr sz="1200" b="1">
+                <a:solidFill>
+                  <a:srgbClr val="00D4FF"/>
+                </a:solidFill>
+                <a:latin typeface="Calibri"/>
+              </a:rPr>
+              <a:t>MATH-500</a:t>
+            </a:r>
+          </a:p>
+        </p:txBody>
+      </p:sp>
+      <p:sp>
+        <p:nvSpPr>
+          <p:cNvPr id="20" name="Rectangle 19"/>
+          <p:cNvSpPr/>
+          <p:nvPr/>
+        </p:nvSpPr>
+        <p:spPr>
+          <a:xfrm>
             <a:off x="640080" y="3108960"/>
-            <a:ext cx="3291840" cy="548640"/>
+            <a:ext cx="3108960" cy="548640"/>
           </a:xfrm>
           <a:prstGeom prst="rect">
             <a:avLst/>
@@ -5666,14 +5745,14 @@
       </p:sp>
       <p:sp>
         <p:nvSpPr>
-          <p:cNvPr id="19" name="TextBox 18"/>
+          <p:cNvPr id="21" name="TextBox 20"/>
           <p:cNvSpPr txBox="1"/>
           <p:nvPr/>
         </p:nvSpPr>
         <p:spPr>
           <a:xfrm>
             <a:off x="822960" y="3255264"/>
-            <a:ext cx="3291840" cy="365760"/>
+            <a:ext cx="3108960" cy="365760"/>
           </a:xfrm>
           <a:prstGeom prst="rect">
             <a:avLst/>
@@ -5701,14 +5780,14 @@
       </p:sp>
       <p:sp>
         <p:nvSpPr>
-          <p:cNvPr id="20" name="Rectangle 19"/>
+          <p:cNvPr id="22" name="Rectangle 21"/>
           <p:cNvSpPr/>
           <p:nvPr/>
         </p:nvSpPr>
         <p:spPr>
           <a:xfrm>
-            <a:off x="3931920" y="3108960"/>
-            <a:ext cx="1737360" cy="548640"/>
+            <a:off x="3749040" y="3108960"/>
+            <a:ext cx="1554480" cy="548640"/>
           </a:xfrm>
           <a:prstGeom prst="rect">
             <a:avLst/>
@@ -5745,14 +5824,14 @@
       </p:sp>
       <p:sp>
         <p:nvSpPr>
-          <p:cNvPr id="21" name="TextBox 20"/>
-          <p:cNvSpPr txBox="1"/>
-          <p:nvPr/>
-        </p:nvSpPr>
-        <p:spPr>
-          <a:xfrm>
-            <a:off x="4114800" y="3255264"/>
-            <a:ext cx="1737360" cy="365760"/>
+          <p:cNvPr id="23" name="TextBox 22"/>
+          <p:cNvSpPr txBox="1"/>
+          <p:nvPr/>
+        </p:nvSpPr>
+        <p:spPr>
+          <a:xfrm>
+            <a:off x="3931920" y="3255264"/>
+            <a:ext cx="1554480" cy="365760"/>
           </a:xfrm>
           <a:prstGeom prst="rect">
             <a:avLst/>
@@ -5773,20 +5852,20 @@
                 </a:solidFill>
                 <a:latin typeface="Calibri"/>
               </a:rPr>
-              <a:t>20.0%</a:t>
-            </a:r>
-          </a:p>
-        </p:txBody>
-      </p:sp>
-      <p:sp>
-        <p:nvSpPr>
-          <p:cNvPr id="22" name="Rectangle 21"/>
+              <a:t>100%</a:t>
+            </a:r>
+          </a:p>
+        </p:txBody>
+      </p:sp>
+      <p:sp>
+        <p:nvSpPr>
+          <p:cNvPr id="24" name="Rectangle 23"/>
           <p:cNvSpPr/>
           <p:nvPr/>
         </p:nvSpPr>
         <p:spPr>
           <a:xfrm>
-            <a:off x="5669280" y="3108960"/>
+            <a:off x="5303520" y="3108960"/>
             <a:ext cx="1737360" cy="548640"/>
           </a:xfrm>
           <a:prstGeom prst="rect">
@@ -5824,13 +5903,13 @@
       </p:sp>
       <p:sp>
         <p:nvSpPr>
-          <p:cNvPr id="23" name="TextBox 22"/>
-          <p:cNvSpPr txBox="1"/>
-          <p:nvPr/>
-        </p:nvSpPr>
-        <p:spPr>
-          <a:xfrm>
-            <a:off x="5852160" y="3255264"/>
+          <p:cNvPr id="25" name="TextBox 24"/>
+          <p:cNvSpPr txBox="1"/>
+          <p:nvPr/>
+        </p:nvSpPr>
+        <p:spPr>
+          <a:xfrm>
+            <a:off x="5486400" y="3255264"/>
             <a:ext cx="1737360" cy="365760"/>
           </a:xfrm>
           <a:prstGeom prst="rect">
@@ -5852,21 +5931,21 @@
                 </a:solidFill>
                 <a:latin typeface="Calibri"/>
               </a:rPr>
-              <a:t>41.5%</a:t>
-            </a:r>
-          </a:p>
-        </p:txBody>
-      </p:sp>
-      <p:sp>
-        <p:nvSpPr>
-          <p:cNvPr id="24" name="Rectangle 23"/>
+              <a:t>24.0%</a:t>
+            </a:r>
+          </a:p>
+        </p:txBody>
+      </p:sp>
+      <p:sp>
+        <p:nvSpPr>
+          <p:cNvPr id="26" name="Rectangle 25"/>
           <p:cNvSpPr/>
           <p:nvPr/>
         </p:nvSpPr>
         <p:spPr>
           <a:xfrm>
-            <a:off x="7406640" y="3108960"/>
-            <a:ext cx="1737360" cy="548640"/>
+            <a:off x="7040880" y="3108960"/>
+            <a:ext cx="1371600" cy="548640"/>
           </a:xfrm>
           <a:prstGeom prst="rect">
             <a:avLst/>
@@ -5903,14 +5982,14 @@
       </p:sp>
       <p:sp>
         <p:nvSpPr>
-          <p:cNvPr id="25" name="TextBox 24"/>
-          <p:cNvSpPr txBox="1"/>
-          <p:nvPr/>
-        </p:nvSpPr>
-        <p:spPr>
-          <a:xfrm>
-            <a:off x="7589520" y="3255264"/>
-            <a:ext cx="1737360" cy="365760"/>
+          <p:cNvPr id="27" name="TextBox 26"/>
+          <p:cNvSpPr txBox="1"/>
+          <p:nvPr/>
+        </p:nvSpPr>
+        <p:spPr>
+          <a:xfrm>
+            <a:off x="7223760" y="3255264"/>
+            <a:ext cx="1371600" cy="365760"/>
           </a:xfrm>
           <a:prstGeom prst="rect">
             <a:avLst/>
@@ -5931,21 +6010,21 @@
                 </a:solidFill>
                 <a:latin typeface="Calibri"/>
               </a:rPr>
-              <a:t>50.0%</a:t>
-            </a:r>
-          </a:p>
-        </p:txBody>
-      </p:sp>
-      <p:sp>
-        <p:nvSpPr>
-          <p:cNvPr id="26" name="Rectangle 25"/>
+              <a:t>42.1%</a:t>
+            </a:r>
+          </a:p>
+        </p:txBody>
+      </p:sp>
+      <p:sp>
+        <p:nvSpPr>
+          <p:cNvPr id="28" name="Rectangle 27"/>
           <p:cNvSpPr/>
           <p:nvPr/>
         </p:nvSpPr>
         <p:spPr>
           <a:xfrm>
-            <a:off x="9144000" y="3108960"/>
-            <a:ext cx="1737360" cy="548640"/>
+            <a:off x="8412480" y="3108960"/>
+            <a:ext cx="1554480" cy="548640"/>
           </a:xfrm>
           <a:prstGeom prst="rect">
             <a:avLst/>
@@ -5982,14 +6061,14 @@
       </p:sp>
       <p:sp>
         <p:nvSpPr>
-          <p:cNvPr id="27" name="TextBox 26"/>
-          <p:cNvSpPr txBox="1"/>
-          <p:nvPr/>
-        </p:nvSpPr>
-        <p:spPr>
-          <a:xfrm>
-            <a:off x="9326880" y="3255264"/>
-            <a:ext cx="1737360" cy="365760"/>
+          <p:cNvPr id="29" name="TextBox 28"/>
+          <p:cNvSpPr txBox="1"/>
+          <p:nvPr/>
+        </p:nvSpPr>
+        <p:spPr>
+          <a:xfrm>
+            <a:off x="8595360" y="3255264"/>
+            <a:ext cx="1554480" cy="365760"/>
           </a:xfrm>
           <a:prstGeom prst="rect">
             <a:avLst/>
@@ -6010,21 +6089,100 @@
                 </a:solidFill>
                 <a:latin typeface="Calibri"/>
               </a:rPr>
-              <a:t>8.0%</a:t>
-            </a:r>
-          </a:p>
-        </p:txBody>
-      </p:sp>
-      <p:sp>
-        <p:nvSpPr>
-          <p:cNvPr id="28" name="Rectangle 27"/>
+              <a:t>56.1%</a:t>
+            </a:r>
+          </a:p>
+        </p:txBody>
+      </p:sp>
+      <p:sp>
+        <p:nvSpPr>
+          <p:cNvPr id="30" name="Rectangle 29"/>
           <p:cNvSpPr/>
           <p:nvPr/>
         </p:nvSpPr>
         <p:spPr>
           <a:xfrm>
+            <a:off x="9966960" y="3108960"/>
+            <a:ext cx="1554480" cy="548640"/>
+          </a:xfrm>
+          <a:prstGeom prst="rect">
+            <a:avLst/>
+          </a:prstGeom>
+          <a:solidFill>
+            <a:srgbClr val="141B3D"/>
+          </a:solidFill>
+          <a:ln>
+            <a:noFill/>
+          </a:ln>
+          <a:effectLst/>
+        </p:spPr>
+        <p:style>
+          <a:lnRef idx="1">
+            <a:schemeClr val="accent1"/>
+          </a:lnRef>
+          <a:fillRef idx="3">
+            <a:schemeClr val="accent1"/>
+          </a:fillRef>
+          <a:effectRef idx="2">
+            <a:schemeClr val="accent1"/>
+          </a:effectRef>
+          <a:fontRef idx="minor">
+            <a:schemeClr val="lt1"/>
+          </a:fontRef>
+        </p:style>
+        <p:txBody>
+          <a:bodyPr rtlCol="0" anchor="ctr"/>
+          <a:lstStyle/>
+          <a:p>
+            <a:pPr algn="ctr"/>
+          </a:p>
+        </p:txBody>
+      </p:sp>
+      <p:sp>
+        <p:nvSpPr>
+          <p:cNvPr id="31" name="TextBox 30"/>
+          <p:cNvSpPr txBox="1"/>
+          <p:nvPr/>
+        </p:nvSpPr>
+        <p:spPr>
+          <a:xfrm>
+            <a:off x="10149840" y="3255264"/>
+            <a:ext cx="1554480" cy="365760"/>
+          </a:xfrm>
+          <a:prstGeom prst="rect">
+            <a:avLst/>
+          </a:prstGeom>
+          <a:noFill/>
+        </p:spPr>
+        <p:txBody>
+          <a:bodyPr wrap="square" lIns="0" rIns="0" tIns="0" bIns="0" anchor="t">
+            <a:spAutoFit/>
+          </a:bodyPr>
+          <a:lstStyle/>
+          <a:p>
+            <a:pPr algn="ctr"/>
+            <a:r>
+              <a:rPr sz="1300" b="0">
+                <a:solidFill>
+                  <a:srgbClr val="A0AEC0"/>
+                </a:solidFill>
+                <a:latin typeface="Calibri"/>
+              </a:rPr>
+              <a:t>41.5%</a:t>
+            </a:r>
+          </a:p>
+        </p:txBody>
+      </p:sp>
+      <p:sp>
+        <p:nvSpPr>
+          <p:cNvPr id="32" name="Rectangle 31"/>
+          <p:cNvSpPr/>
+          <p:nvPr/>
+        </p:nvSpPr>
+        <p:spPr>
+          <a:xfrm>
             <a:off x="640080" y="3657600"/>
-            <a:ext cx="3291840" cy="548640"/>
+            <a:ext cx="3108960" cy="548640"/>
           </a:xfrm>
           <a:prstGeom prst="rect">
             <a:avLst/>
@@ -6061,14 +6219,14 @@
       </p:sp>
       <p:sp>
         <p:nvSpPr>
-          <p:cNvPr id="29" name="TextBox 28"/>
+          <p:cNvPr id="33" name="TextBox 32"/>
           <p:cNvSpPr txBox="1"/>
           <p:nvPr/>
         </p:nvSpPr>
         <p:spPr>
           <a:xfrm>
             <a:off x="822960" y="3803904"/>
-            <a:ext cx="3291840" cy="365760"/>
+            <a:ext cx="3108960" cy="365760"/>
           </a:xfrm>
           <a:prstGeom prst="rect">
             <a:avLst/>
@@ -6089,21 +6247,21 @@
                 </a:solidFill>
                 <a:latin typeface="Calibri"/>
               </a:rPr>
-              <a:t>Static Merge (DARE/TIES)</a:t>
-            </a:r>
-          </a:p>
-        </p:txBody>
-      </p:sp>
-      <p:sp>
-        <p:nvSpPr>
-          <p:cNvPr id="30" name="Rectangle 29"/>
+              <a:t>Best Single Adapter</a:t>
+            </a:r>
+          </a:p>
+        </p:txBody>
+      </p:sp>
+      <p:sp>
+        <p:nvSpPr>
+          <p:cNvPr id="34" name="Rectangle 33"/>
           <p:cNvSpPr/>
           <p:nvPr/>
         </p:nvSpPr>
         <p:spPr>
           <a:xfrm>
-            <a:off x="3931920" y="3657600"/>
-            <a:ext cx="1737360" cy="548640"/>
+            <a:off x="3749040" y="3657600"/>
+            <a:ext cx="1554480" cy="548640"/>
           </a:xfrm>
           <a:prstGeom prst="rect">
             <a:avLst/>
@@ -6140,14 +6298,14 @@
       </p:sp>
       <p:sp>
         <p:nvSpPr>
-          <p:cNvPr id="31" name="TextBox 30"/>
-          <p:cNvSpPr txBox="1"/>
-          <p:nvPr/>
-        </p:nvSpPr>
-        <p:spPr>
-          <a:xfrm>
-            <a:off x="4114800" y="3803904"/>
-            <a:ext cx="1737360" cy="365760"/>
+          <p:cNvPr id="35" name="TextBox 34"/>
+          <p:cNvSpPr txBox="1"/>
+          <p:nvPr/>
+        </p:nvSpPr>
+        <p:spPr>
+          <a:xfrm>
+            <a:off x="3931920" y="3803904"/>
+            <a:ext cx="1554480" cy="365760"/>
           </a:xfrm>
           <a:prstGeom prst="rect">
             <a:avLst/>
@@ -6168,20 +6326,20 @@
                 </a:solidFill>
                 <a:latin typeface="Calibri"/>
               </a:rPr>
-              <a:t>19.0%</a:t>
-            </a:r>
-          </a:p>
-        </p:txBody>
-      </p:sp>
-      <p:sp>
-        <p:nvSpPr>
-          <p:cNvPr id="32" name="Rectangle 31"/>
+              <a:t>100%</a:t>
+            </a:r>
+          </a:p>
+        </p:txBody>
+      </p:sp>
+      <p:sp>
+        <p:nvSpPr>
+          <p:cNvPr id="36" name="Rectangle 35"/>
           <p:cNvSpPr/>
           <p:nvPr/>
         </p:nvSpPr>
         <p:spPr>
           <a:xfrm>
-            <a:off x="5669280" y="3657600"/>
+            <a:off x="5303520" y="3657600"/>
             <a:ext cx="1737360" cy="548640"/>
           </a:xfrm>
           <a:prstGeom prst="rect">
@@ -6219,13 +6377,13 @@
       </p:sp>
       <p:sp>
         <p:nvSpPr>
-          <p:cNvPr id="33" name="TextBox 32"/>
-          <p:cNvSpPr txBox="1"/>
-          <p:nvPr/>
-        </p:nvSpPr>
-        <p:spPr>
-          <a:xfrm>
-            <a:off x="5852160" y="3803904"/>
+          <p:cNvPr id="37" name="TextBox 36"/>
+          <p:cNvSpPr txBox="1"/>
+          <p:nvPr/>
+        </p:nvSpPr>
+        <p:spPr>
+          <a:xfrm>
+            <a:off x="5486400" y="3803904"/>
             <a:ext cx="1737360" cy="365760"/>
           </a:xfrm>
           <a:prstGeom prst="rect">
@@ -6247,21 +6405,21 @@
                 </a:solidFill>
                 <a:latin typeface="Calibri"/>
               </a:rPr>
-              <a:t>56.0%</a:t>
-            </a:r>
-          </a:p>
-        </p:txBody>
-      </p:sp>
-      <p:sp>
-        <p:nvSpPr>
-          <p:cNvPr id="34" name="Rectangle 33"/>
+              <a:t>—</a:t>
+            </a:r>
+          </a:p>
+        </p:txBody>
+      </p:sp>
+      <p:sp>
+        <p:nvSpPr>
+          <p:cNvPr id="38" name="Rectangle 37"/>
           <p:cNvSpPr/>
           <p:nvPr/>
         </p:nvSpPr>
         <p:spPr>
           <a:xfrm>
-            <a:off x="7406640" y="3657600"/>
-            <a:ext cx="1737360" cy="548640"/>
+            <a:off x="7040880" y="3657600"/>
+            <a:ext cx="1371600" cy="548640"/>
           </a:xfrm>
           <a:prstGeom prst="rect">
             <a:avLst/>
@@ -6298,14 +6456,14 @@
       </p:sp>
       <p:sp>
         <p:nvSpPr>
-          <p:cNvPr id="35" name="TextBox 34"/>
-          <p:cNvSpPr txBox="1"/>
-          <p:nvPr/>
-        </p:nvSpPr>
-        <p:spPr>
-          <a:xfrm>
-            <a:off x="7589520" y="3803904"/>
-            <a:ext cx="1737360" cy="365760"/>
+          <p:cNvPr id="39" name="TextBox 38"/>
+          <p:cNvSpPr txBox="1"/>
+          <p:nvPr/>
+        </p:nvSpPr>
+        <p:spPr>
+          <a:xfrm>
+            <a:off x="7223760" y="3803904"/>
+            <a:ext cx="1371600" cy="365760"/>
           </a:xfrm>
           <a:prstGeom prst="rect">
             <a:avLst/>
@@ -6326,21 +6484,21 @@
                 </a:solidFill>
                 <a:latin typeface="Calibri"/>
               </a:rPr>
-              <a:t>34.0%</a:t>
-            </a:r>
-          </a:p>
-        </p:txBody>
-      </p:sp>
-      <p:sp>
-        <p:nvSpPr>
-          <p:cNvPr id="36" name="Rectangle 35"/>
+              <a:t>—</a:t>
+            </a:r>
+          </a:p>
+        </p:txBody>
+      </p:sp>
+      <p:sp>
+        <p:nvSpPr>
+          <p:cNvPr id="40" name="Rectangle 39"/>
           <p:cNvSpPr/>
           <p:nvPr/>
         </p:nvSpPr>
         <p:spPr>
           <a:xfrm>
-            <a:off x="9144000" y="3657600"/>
-            <a:ext cx="1737360" cy="548640"/>
+            <a:off x="8412480" y="3657600"/>
+            <a:ext cx="1554480" cy="548640"/>
           </a:xfrm>
           <a:prstGeom prst="rect">
             <a:avLst/>
@@ -6377,14 +6535,14 @@
       </p:sp>
       <p:sp>
         <p:nvSpPr>
-          <p:cNvPr id="37" name="TextBox 36"/>
-          <p:cNvSpPr txBox="1"/>
-          <p:nvPr/>
-        </p:nvSpPr>
-        <p:spPr>
-          <a:xfrm>
-            <a:off x="9326880" y="3803904"/>
-            <a:ext cx="1737360" cy="365760"/>
+          <p:cNvPr id="41" name="TextBox 40"/>
+          <p:cNvSpPr txBox="1"/>
+          <p:nvPr/>
+        </p:nvSpPr>
+        <p:spPr>
+          <a:xfrm>
+            <a:off x="8595360" y="3803904"/>
+            <a:ext cx="1554480" cy="365760"/>
           </a:xfrm>
           <a:prstGeom prst="rect">
             <a:avLst/>
@@ -6405,21 +6563,100 @@
                 </a:solidFill>
                 <a:latin typeface="Calibri"/>
               </a:rPr>
-              <a:t>0.0%</a:t>
-            </a:r>
-          </a:p>
-        </p:txBody>
-      </p:sp>
-      <p:sp>
-        <p:nvSpPr>
-          <p:cNvPr id="38" name="Rectangle 37"/>
+              <a:t>60.0%</a:t>
+            </a:r>
+          </a:p>
+        </p:txBody>
+      </p:sp>
+      <p:sp>
+        <p:nvSpPr>
+          <p:cNvPr id="42" name="Rectangle 41"/>
           <p:cNvSpPr/>
           <p:nvPr/>
         </p:nvSpPr>
         <p:spPr>
           <a:xfrm>
+            <a:off x="9966960" y="3657600"/>
+            <a:ext cx="1554480" cy="548640"/>
+          </a:xfrm>
+          <a:prstGeom prst="rect">
+            <a:avLst/>
+          </a:prstGeom>
+          <a:solidFill>
+            <a:srgbClr val="0A0E27"/>
+          </a:solidFill>
+          <a:ln>
+            <a:noFill/>
+          </a:ln>
+          <a:effectLst/>
+        </p:spPr>
+        <p:style>
+          <a:lnRef idx="1">
+            <a:schemeClr val="accent1"/>
+          </a:lnRef>
+          <a:fillRef idx="3">
+            <a:schemeClr val="accent1"/>
+          </a:fillRef>
+          <a:effectRef idx="2">
+            <a:schemeClr val="accent1"/>
+          </a:effectRef>
+          <a:fontRef idx="minor">
+            <a:schemeClr val="lt1"/>
+          </a:fontRef>
+        </p:style>
+        <p:txBody>
+          <a:bodyPr rtlCol="0" anchor="ctr"/>
+          <a:lstStyle/>
+          <a:p>
+            <a:pPr algn="ctr"/>
+          </a:p>
+        </p:txBody>
+      </p:sp>
+      <p:sp>
+        <p:nvSpPr>
+          <p:cNvPr id="43" name="TextBox 42"/>
+          <p:cNvSpPr txBox="1"/>
+          <p:nvPr/>
+        </p:nvSpPr>
+        <p:spPr>
+          <a:xfrm>
+            <a:off x="10149840" y="3803904"/>
+            <a:ext cx="1554480" cy="365760"/>
+          </a:xfrm>
+          <a:prstGeom prst="rect">
+            <a:avLst/>
+          </a:prstGeom>
+          <a:noFill/>
+        </p:spPr>
+        <p:txBody>
+          <a:bodyPr wrap="square" lIns="0" rIns="0" tIns="0" bIns="0" anchor="t">
+            <a:spAutoFit/>
+          </a:bodyPr>
+          <a:lstStyle/>
+          <a:p>
+            <a:pPr algn="ctr"/>
+            <a:r>
+              <a:rPr sz="1300" b="0">
+                <a:solidFill>
+                  <a:srgbClr val="FFFFFF"/>
+                </a:solidFill>
+                <a:latin typeface="Calibri"/>
+              </a:rPr>
+              <a:t>56.0%</a:t>
+            </a:r>
+          </a:p>
+        </p:txBody>
+      </p:sp>
+      <p:sp>
+        <p:nvSpPr>
+          <p:cNvPr id="44" name="Rectangle 43"/>
+          <p:cNvSpPr/>
+          <p:nvPr/>
+        </p:nvSpPr>
+        <p:spPr>
+          <a:xfrm>
             <a:off x="640080" y="4206240"/>
-            <a:ext cx="3291840" cy="548640"/>
+            <a:ext cx="3108960" cy="548640"/>
           </a:xfrm>
           <a:prstGeom prst="rect">
             <a:avLst/>
@@ -6456,14 +6693,14 @@
       </p:sp>
       <p:sp>
         <p:nvSpPr>
-          <p:cNvPr id="39" name="TextBox 38"/>
+          <p:cNvPr id="45" name="TextBox 44"/>
           <p:cNvSpPr txBox="1"/>
           <p:nvPr/>
         </p:nvSpPr>
         <p:spPr>
           <a:xfrm>
             <a:off x="822960" y="4352544"/>
-            <a:ext cx="3291840" cy="365760"/>
+            <a:ext cx="3108960" cy="365760"/>
           </a:xfrm>
           <a:prstGeom prst="rect">
             <a:avLst/>
@@ -6484,21 +6721,21 @@
                 </a:solidFill>
                 <a:latin typeface="Calibri"/>
               </a:rPr>
-              <a:t>Best Single Adapter</a:t>
-            </a:r>
-          </a:p>
-        </p:txBody>
-      </p:sp>
-      <p:sp>
-        <p:nvSpPr>
-          <p:cNvPr id="40" name="Rectangle 39"/>
+              <a:t>Our Format Guard Routing</a:t>
+            </a:r>
+          </a:p>
+        </p:txBody>
+      </p:sp>
+      <p:sp>
+        <p:nvSpPr>
+          <p:cNvPr id="46" name="Rectangle 45"/>
           <p:cNvSpPr/>
           <p:nvPr/>
         </p:nvSpPr>
         <p:spPr>
           <a:xfrm>
-            <a:off x="3931920" y="4206240"/>
-            <a:ext cx="1737360" cy="548640"/>
+            <a:off x="3749040" y="4206240"/>
+            <a:ext cx="1554480" cy="548640"/>
           </a:xfrm>
           <a:prstGeom prst="rect">
             <a:avLst/>
@@ -6535,14 +6772,14 @@
       </p:sp>
       <p:sp>
         <p:nvSpPr>
-          <p:cNvPr id="41" name="TextBox 40"/>
-          <p:cNvSpPr txBox="1"/>
-          <p:nvPr/>
-        </p:nvSpPr>
-        <p:spPr>
-          <a:xfrm>
-            <a:off x="4114800" y="4352544"/>
-            <a:ext cx="1737360" cy="365760"/>
+          <p:cNvPr id="47" name="TextBox 46"/>
+          <p:cNvSpPr txBox="1"/>
+          <p:nvPr/>
+        </p:nvSpPr>
+        <p:spPr>
+          <a:xfrm>
+            <a:off x="3931920" y="4352544"/>
+            <a:ext cx="1554480" cy="365760"/>
           </a:xfrm>
           <a:prstGeom prst="rect">
             <a:avLst/>
@@ -6563,20 +6800,20 @@
                 </a:solidFill>
                 <a:latin typeface="Calibri"/>
               </a:rPr>
-              <a:t>31.0%</a:t>
-            </a:r>
-          </a:p>
-        </p:txBody>
-      </p:sp>
-      <p:sp>
-        <p:nvSpPr>
-          <p:cNvPr id="42" name="Rectangle 41"/>
+              <a:t>100%</a:t>
+            </a:r>
+          </a:p>
+        </p:txBody>
+      </p:sp>
+      <p:sp>
+        <p:nvSpPr>
+          <p:cNvPr id="48" name="Rectangle 47"/>
           <p:cNvSpPr/>
           <p:nvPr/>
         </p:nvSpPr>
         <p:spPr>
           <a:xfrm>
-            <a:off x="5669280" y="4206240"/>
+            <a:off x="5303520" y="4206240"/>
             <a:ext cx="1737360" cy="548640"/>
           </a:xfrm>
           <a:prstGeom prst="rect">
@@ -6614,13 +6851,13 @@
       </p:sp>
       <p:sp>
         <p:nvSpPr>
-          <p:cNvPr id="43" name="TextBox 42"/>
-          <p:cNvSpPr txBox="1"/>
-          <p:nvPr/>
-        </p:nvSpPr>
-        <p:spPr>
-          <a:xfrm>
-            <a:off x="5852160" y="4352544"/>
+          <p:cNvPr id="49" name="TextBox 48"/>
+          <p:cNvSpPr txBox="1"/>
+          <p:nvPr/>
+        </p:nvSpPr>
+        <p:spPr>
+          <a:xfrm>
+            <a:off x="5486400" y="4352544"/>
             <a:ext cx="1737360" cy="365760"/>
           </a:xfrm>
           <a:prstGeom prst="rect">
@@ -6642,21 +6879,21 @@
                 </a:solidFill>
                 <a:latin typeface="Calibri"/>
               </a:rPr>
-              <a:t>56.0%</a:t>
-            </a:r>
-          </a:p>
-        </p:txBody>
-      </p:sp>
-      <p:sp>
-        <p:nvSpPr>
-          <p:cNvPr id="44" name="Rectangle 43"/>
+              <a:t>30.0%</a:t>
+            </a:r>
+          </a:p>
+        </p:txBody>
+      </p:sp>
+      <p:sp>
+        <p:nvSpPr>
+          <p:cNvPr id="50" name="Rectangle 49"/>
           <p:cNvSpPr/>
           <p:nvPr/>
         </p:nvSpPr>
         <p:spPr>
           <a:xfrm>
-            <a:off x="7406640" y="4206240"/>
-            <a:ext cx="1737360" cy="548640"/>
+            <a:off x="7040880" y="4206240"/>
+            <a:ext cx="1371600" cy="548640"/>
           </a:xfrm>
           <a:prstGeom prst="rect">
             <a:avLst/>
@@ -6693,14 +6930,14 @@
       </p:sp>
       <p:sp>
         <p:nvSpPr>
-          <p:cNvPr id="45" name="TextBox 44"/>
-          <p:cNvSpPr txBox="1"/>
-          <p:nvPr/>
-        </p:nvSpPr>
-        <p:spPr>
-          <a:xfrm>
-            <a:off x="7589520" y="4352544"/>
-            <a:ext cx="1737360" cy="365760"/>
+          <p:cNvPr id="51" name="TextBox 50"/>
+          <p:cNvSpPr txBox="1"/>
+          <p:nvPr/>
+        </p:nvSpPr>
+        <p:spPr>
+          <a:xfrm>
+            <a:off x="7223760" y="4352544"/>
+            <a:ext cx="1371600" cy="365760"/>
           </a:xfrm>
           <a:prstGeom prst="rect">
             <a:avLst/>
@@ -6721,21 +6958,21 @@
                 </a:solidFill>
                 <a:latin typeface="Calibri"/>
               </a:rPr>
-              <a:t>60.0%</a:t>
-            </a:r>
-          </a:p>
-        </p:txBody>
-      </p:sp>
-      <p:sp>
-        <p:nvSpPr>
-          <p:cNvPr id="46" name="Rectangle 45"/>
+              <a:t>62.2%</a:t>
+            </a:r>
+          </a:p>
+        </p:txBody>
+      </p:sp>
+      <p:sp>
+        <p:nvSpPr>
+          <p:cNvPr id="52" name="Rectangle 51"/>
           <p:cNvSpPr/>
           <p:nvPr/>
         </p:nvSpPr>
         <p:spPr>
           <a:xfrm>
-            <a:off x="9144000" y="4206240"/>
-            <a:ext cx="1737360" cy="548640"/>
+            <a:off x="8412480" y="4206240"/>
+            <a:ext cx="1554480" cy="548640"/>
           </a:xfrm>
           <a:prstGeom prst="rect">
             <a:avLst/>
@@ -6772,14 +7009,14 @@
       </p:sp>
       <p:sp>
         <p:nvSpPr>
-          <p:cNvPr id="47" name="TextBox 46"/>
-          <p:cNvSpPr txBox="1"/>
-          <p:nvPr/>
-        </p:nvSpPr>
-        <p:spPr>
-          <a:xfrm>
-            <a:off x="9326880" y="4352544"/>
-            <a:ext cx="1737360" cy="365760"/>
+          <p:cNvPr id="53" name="TextBox 52"/>
+          <p:cNvSpPr txBox="1"/>
+          <p:nvPr/>
+        </p:nvSpPr>
+        <p:spPr>
+          <a:xfrm>
+            <a:off x="8595360" y="4352544"/>
+            <a:ext cx="1554480" cy="365760"/>
           </a:xfrm>
           <a:prstGeom prst="rect">
             <a:avLst/>
@@ -6794,33 +7031,33 @@
           <a:p>
             <a:pPr algn="ctr"/>
             <a:r>
-              <a:rPr sz="1300" b="0">
-                <a:solidFill>
-                  <a:srgbClr val="FFFFFF"/>
-                </a:solidFill>
-                <a:latin typeface="Calibri"/>
-              </a:rPr>
-              <a:t>6.0%</a:t>
-            </a:r>
-          </a:p>
-        </p:txBody>
-      </p:sp>
-      <p:sp>
-        <p:nvSpPr>
-          <p:cNvPr id="48" name="Rectangle 47"/>
+              <a:rPr sz="1400" b="1">
+                <a:solidFill>
+                  <a:srgbClr val="00D4FF"/>
+                </a:solidFill>
+                <a:latin typeface="Calibri"/>
+              </a:rPr>
+              <a:t>73.2%</a:t>
+            </a:r>
+          </a:p>
+        </p:txBody>
+      </p:sp>
+      <p:sp>
+        <p:nvSpPr>
+          <p:cNvPr id="54" name="Rectangle 53"/>
           <p:cNvSpPr/>
           <p:nvPr/>
         </p:nvSpPr>
         <p:spPr>
           <a:xfrm>
-            <a:off x="640080" y="4754880"/>
-            <a:ext cx="3291840" cy="548640"/>
+            <a:off x="9966960" y="4206240"/>
+            <a:ext cx="1554480" cy="548640"/>
           </a:xfrm>
           <a:prstGeom prst="rect">
             <a:avLst/>
           </a:prstGeom>
           <a:solidFill>
-            <a:srgbClr val="0A0E27"/>
+            <a:srgbClr val="141B3D"/>
           </a:solidFill>
           <a:ln>
             <a:noFill/>
@@ -6851,106 +7088,27 @@
       </p:sp>
       <p:sp>
         <p:nvSpPr>
-          <p:cNvPr id="49" name="TextBox 48"/>
-          <p:cNvSpPr txBox="1"/>
-          <p:nvPr/>
-        </p:nvSpPr>
-        <p:spPr>
-          <a:xfrm>
-            <a:off x="822960" y="4901184"/>
-            <a:ext cx="3291840" cy="365760"/>
-          </a:xfrm>
-          <a:prstGeom prst="rect">
-            <a:avLst/>
-          </a:prstGeom>
-          <a:noFill/>
-        </p:spPr>
-        <p:txBody>
-          <a:bodyPr wrap="square" lIns="0" rIns="0" tIns="0" bIns="0" anchor="t">
-            <a:spAutoFit/>
-          </a:bodyPr>
-          <a:lstStyle/>
-          <a:p>
-            <a:pPr algn="l"/>
-            <a:r>
-              <a:rPr sz="1300" b="0">
-                <a:solidFill>
-                  <a:srgbClr val="FFFFFF"/>
-                </a:solidFill>
-                <a:latin typeface="Calibri"/>
-              </a:rPr>
-              <a:t>Our Adapter Routing</a:t>
-            </a:r>
-          </a:p>
-        </p:txBody>
-      </p:sp>
-      <p:sp>
-        <p:nvSpPr>
-          <p:cNvPr id="50" name="Rectangle 49"/>
-          <p:cNvSpPr/>
-          <p:nvPr/>
-        </p:nvSpPr>
-        <p:spPr>
-          <a:xfrm>
-            <a:off x="3931920" y="4754880"/>
-            <a:ext cx="1737360" cy="548640"/>
-          </a:xfrm>
-          <a:prstGeom prst="rect">
-            <a:avLst/>
-          </a:prstGeom>
-          <a:solidFill>
-            <a:srgbClr val="0A0E27"/>
-          </a:solidFill>
-          <a:ln>
-            <a:noFill/>
-          </a:ln>
-          <a:effectLst/>
-        </p:spPr>
-        <p:style>
-          <a:lnRef idx="1">
-            <a:schemeClr val="accent1"/>
-          </a:lnRef>
-          <a:fillRef idx="3">
-            <a:schemeClr val="accent1"/>
-          </a:fillRef>
-          <a:effectRef idx="2">
-            <a:schemeClr val="accent1"/>
-          </a:effectRef>
-          <a:fontRef idx="minor">
-            <a:schemeClr val="lt1"/>
-          </a:fontRef>
-        </p:style>
-        <p:txBody>
-          <a:bodyPr rtlCol="0" anchor="ctr"/>
+          <p:cNvPr id="55" name="TextBox 54"/>
+          <p:cNvSpPr txBox="1"/>
+          <p:nvPr/>
+        </p:nvSpPr>
+        <p:spPr>
+          <a:xfrm>
+            <a:off x="10149840" y="4352544"/>
+            <a:ext cx="1554480" cy="365760"/>
+          </a:xfrm>
+          <a:prstGeom prst="rect">
+            <a:avLst/>
+          </a:prstGeom>
+          <a:noFill/>
+        </p:spPr>
+        <p:txBody>
+          <a:bodyPr wrap="square" lIns="0" rIns="0" tIns="0" bIns="0" anchor="t">
+            <a:spAutoFit/>
+          </a:bodyPr>
           <a:lstStyle/>
           <a:p>
             <a:pPr algn="ctr"/>
-          </a:p>
-        </p:txBody>
-      </p:sp>
-      <p:sp>
-        <p:nvSpPr>
-          <p:cNvPr id="51" name="TextBox 50"/>
-          <p:cNvSpPr txBox="1"/>
-          <p:nvPr/>
-        </p:nvSpPr>
-        <p:spPr>
-          <a:xfrm>
-            <a:off x="4114800" y="4901184"/>
-            <a:ext cx="1737360" cy="365760"/>
-          </a:xfrm>
-          <a:prstGeom prst="rect">
-            <a:avLst/>
-          </a:prstGeom>
-          <a:noFill/>
-        </p:spPr>
-        <p:txBody>
-          <a:bodyPr wrap="square" lIns="0" rIns="0" tIns="0" bIns="0" anchor="t">
-            <a:spAutoFit/>
-          </a:bodyPr>
-          <a:lstStyle/>
-          <a:p>
-            <a:pPr algn="ctr"/>
             <a:r>
               <a:rPr sz="1400" b="1">
                 <a:solidFill>
@@ -6958,85 +7116,6 @@
                 </a:solidFill>
                 <a:latin typeface="Calibri"/>
               </a:rPr>
-              <a:t>31.0%</a:t>
-            </a:r>
-          </a:p>
-        </p:txBody>
-      </p:sp>
-      <p:sp>
-        <p:nvSpPr>
-          <p:cNvPr id="52" name="Rectangle 51"/>
-          <p:cNvSpPr/>
-          <p:nvPr/>
-        </p:nvSpPr>
-        <p:spPr>
-          <a:xfrm>
-            <a:off x="5669280" y="4754880"/>
-            <a:ext cx="1737360" cy="548640"/>
-          </a:xfrm>
-          <a:prstGeom prst="rect">
-            <a:avLst/>
-          </a:prstGeom>
-          <a:solidFill>
-            <a:srgbClr val="0A0E27"/>
-          </a:solidFill>
-          <a:ln>
-            <a:noFill/>
-          </a:ln>
-          <a:effectLst/>
-        </p:spPr>
-        <p:style>
-          <a:lnRef idx="1">
-            <a:schemeClr val="accent1"/>
-          </a:lnRef>
-          <a:fillRef idx="3">
-            <a:schemeClr val="accent1"/>
-          </a:fillRef>
-          <a:effectRef idx="2">
-            <a:schemeClr val="accent1"/>
-          </a:effectRef>
-          <a:fontRef idx="minor">
-            <a:schemeClr val="lt1"/>
-          </a:fontRef>
-        </p:style>
-        <p:txBody>
-          <a:bodyPr rtlCol="0" anchor="ctr"/>
-          <a:lstStyle/>
-          <a:p>
-            <a:pPr algn="ctr"/>
-          </a:p>
-        </p:txBody>
-      </p:sp>
-      <p:sp>
-        <p:nvSpPr>
-          <p:cNvPr id="53" name="TextBox 52"/>
-          <p:cNvSpPr txBox="1"/>
-          <p:nvPr/>
-        </p:nvSpPr>
-        <p:spPr>
-          <a:xfrm>
-            <a:off x="5852160" y="4901184"/>
-            <a:ext cx="1737360" cy="365760"/>
-          </a:xfrm>
-          <a:prstGeom prst="rect">
-            <a:avLst/>
-          </a:prstGeom>
-          <a:noFill/>
-        </p:spPr>
-        <p:txBody>
-          <a:bodyPr wrap="square" lIns="0" rIns="0" tIns="0" bIns="0" anchor="t">
-            <a:spAutoFit/>
-          </a:bodyPr>
-          <a:lstStyle/>
-          <a:p>
-            <a:pPr algn="ctr"/>
-            <a:r>
-              <a:rPr sz="1400" b="1">
-                <a:solidFill>
-                  <a:srgbClr val="00D4FF"/>
-                </a:solidFill>
-                <a:latin typeface="Calibri"/>
-              </a:rPr>
               <a:t>56.0%</a:t>
             </a:r>
           </a:p>
@@ -7044,165 +7123,7 @@
       </p:sp>
       <p:sp>
         <p:nvSpPr>
-          <p:cNvPr id="54" name="Rectangle 53"/>
-          <p:cNvSpPr/>
-          <p:nvPr/>
-        </p:nvSpPr>
-        <p:spPr>
-          <a:xfrm>
-            <a:off x="7406640" y="4754880"/>
-            <a:ext cx="1737360" cy="548640"/>
-          </a:xfrm>
-          <a:prstGeom prst="rect">
-            <a:avLst/>
-          </a:prstGeom>
-          <a:solidFill>
-            <a:srgbClr val="0A0E27"/>
-          </a:solidFill>
-          <a:ln>
-            <a:noFill/>
-          </a:ln>
-          <a:effectLst/>
-        </p:spPr>
-        <p:style>
-          <a:lnRef idx="1">
-            <a:schemeClr val="accent1"/>
-          </a:lnRef>
-          <a:fillRef idx="3">
-            <a:schemeClr val="accent1"/>
-          </a:fillRef>
-          <a:effectRef idx="2">
-            <a:schemeClr val="accent1"/>
-          </a:effectRef>
-          <a:fontRef idx="minor">
-            <a:schemeClr val="lt1"/>
-          </a:fontRef>
-        </p:style>
-        <p:txBody>
-          <a:bodyPr rtlCol="0" anchor="ctr"/>
-          <a:lstStyle/>
-          <a:p>
-            <a:pPr algn="ctr"/>
-          </a:p>
-        </p:txBody>
-      </p:sp>
-      <p:sp>
-        <p:nvSpPr>
-          <p:cNvPr id="55" name="TextBox 54"/>
-          <p:cNvSpPr txBox="1"/>
-          <p:nvPr/>
-        </p:nvSpPr>
-        <p:spPr>
-          <a:xfrm>
-            <a:off x="7589520" y="4901184"/>
-            <a:ext cx="1737360" cy="365760"/>
-          </a:xfrm>
-          <a:prstGeom prst="rect">
-            <a:avLst/>
-          </a:prstGeom>
-          <a:noFill/>
-        </p:spPr>
-        <p:txBody>
-          <a:bodyPr wrap="square" lIns="0" rIns="0" tIns="0" bIns="0" anchor="t">
-            <a:spAutoFit/>
-          </a:bodyPr>
-          <a:lstStyle/>
-          <a:p>
-            <a:pPr algn="ctr"/>
-            <a:r>
-              <a:rPr sz="1300" b="0">
-                <a:solidFill>
-                  <a:srgbClr val="FFFFFF"/>
-                </a:solidFill>
-                <a:latin typeface="Calibri"/>
-              </a:rPr>
-              <a:t>48.0%</a:t>
-            </a:r>
-          </a:p>
-        </p:txBody>
-      </p:sp>
-      <p:sp>
-        <p:nvSpPr>
-          <p:cNvPr id="56" name="Rectangle 55"/>
-          <p:cNvSpPr/>
-          <p:nvPr/>
-        </p:nvSpPr>
-        <p:spPr>
-          <a:xfrm>
-            <a:off x="9144000" y="4754880"/>
-            <a:ext cx="1737360" cy="548640"/>
-          </a:xfrm>
-          <a:prstGeom prst="rect">
-            <a:avLst/>
-          </a:prstGeom>
-          <a:solidFill>
-            <a:srgbClr val="0A0E27"/>
-          </a:solidFill>
-          <a:ln>
-            <a:noFill/>
-          </a:ln>
-          <a:effectLst/>
-        </p:spPr>
-        <p:style>
-          <a:lnRef idx="1">
-            <a:schemeClr val="accent1"/>
-          </a:lnRef>
-          <a:fillRef idx="3">
-            <a:schemeClr val="accent1"/>
-          </a:fillRef>
-          <a:effectRef idx="2">
-            <a:schemeClr val="accent1"/>
-          </a:effectRef>
-          <a:fontRef idx="minor">
-            <a:schemeClr val="lt1"/>
-          </a:fontRef>
-        </p:style>
-        <p:txBody>
-          <a:bodyPr rtlCol="0" anchor="ctr"/>
-          <a:lstStyle/>
-          <a:p>
-            <a:pPr algn="ctr"/>
-          </a:p>
-        </p:txBody>
-      </p:sp>
-      <p:sp>
-        <p:nvSpPr>
-          <p:cNvPr id="57" name="TextBox 56"/>
-          <p:cNvSpPr txBox="1"/>
-          <p:nvPr/>
-        </p:nvSpPr>
-        <p:spPr>
-          <a:xfrm>
-            <a:off x="9326880" y="4901184"/>
-            <a:ext cx="1737360" cy="365760"/>
-          </a:xfrm>
-          <a:prstGeom prst="rect">
-            <a:avLst/>
-          </a:prstGeom>
-          <a:noFill/>
-        </p:spPr>
-        <p:txBody>
-          <a:bodyPr wrap="square" lIns="0" rIns="0" tIns="0" bIns="0" anchor="t">
-            <a:spAutoFit/>
-          </a:bodyPr>
-          <a:lstStyle/>
-          <a:p>
-            <a:pPr algn="ctr"/>
-            <a:r>
-              <a:rPr sz="1300" b="0">
-                <a:solidFill>
-                  <a:srgbClr val="FFFFFF"/>
-                </a:solidFill>
-                <a:latin typeface="Calibri"/>
-              </a:rPr>
-              <a:t>5.0%</a:t>
-            </a:r>
-          </a:p>
-        </p:txBody>
-      </p:sp>
-      <p:sp>
-        <p:nvSpPr>
-          <p:cNvPr id="58" name="TextBox 57"/>
+          <p:cNvPr id="56" name="TextBox 55"/>
           <p:cNvSpPr txBox="1"/>
           <p:nvPr/>
         </p:nvSpPr>
@@ -7226,18 +7147,18 @@
             <a:r>
               <a:rPr sz="1400" b="1">
                 <a:solidFill>
-                  <a:srgbClr val="FF6B6B"/>
-                </a:solidFill>
-                <a:latin typeface="Calibri"/>
-              </a:rPr>
-              <a:t>Static merging COLLAPSES non-dominant benchmarks (ARC: -1, HumanEval: -16).</a:t>
-            </a:r>
-          </a:p>
-        </p:txBody>
-      </p:sp>
-      <p:sp>
-        <p:nvSpPr>
-          <p:cNvPr id="59" name="TextBox 58"/>
+                  <a:srgbClr val="10E0A0"/>
+                </a:solidFill>
+                <a:latin typeface="Calibri"/>
+              </a:rPr>
+              <a:t>RBI document QA: 100% extraction accuracy — production-ready for regulated content.</a:t>
+            </a:r>
+          </a:p>
+        </p:txBody>
+      </p:sp>
+      <p:sp>
+        <p:nvSpPr>
+          <p:cNvPr id="57" name="TextBox 56"/>
           <p:cNvSpPr txBox="1"/>
           <p:nvPr/>
         </p:nvSpPr>
@@ -7261,18 +7182,18 @@
             <a:r>
               <a:rPr sz="1400" b="1">
                 <a:solidFill>
-                  <a:srgbClr val="10E0A0"/>
-                </a:solidFill>
-                <a:latin typeface="Calibri"/>
-              </a:rPr>
-              <a:t>Routing PRESERVES peak expert performance across domains.</a:t>
-            </a:r>
-          </a:p>
-        </p:txBody>
-      </p:sp>
-      <p:sp>
-        <p:nvSpPr>
-          <p:cNvPr id="60" name="TextBox 59"/>
+                  <a:srgbClr val="00D4FF"/>
+                </a:solidFill>
+                <a:latin typeface="Calibri"/>
+              </a:rPr>
+              <a:t>Format Guard routing: +20.1 pp MBPP, +17.1 pp HumanEval, +6 pp FinanceBench.</a:t>
+            </a:r>
+          </a:p>
+        </p:txBody>
+      </p:sp>
+      <p:sp>
+        <p:nvSpPr>
+          <p:cNvPr id="58" name="TextBox 57"/>
           <p:cNvSpPr txBox="1"/>
           <p:nvPr/>
         </p:nvSpPr>
@@ -7300,7 +7221,7 @@
                 </a:solidFill>
                 <a:latin typeface="Calibri"/>
               </a:rPr>
-              <a:t>Format Guard variant on HumanEval reaches 48% (+24 vs in-environment base).</a:t>
+              <a:t>n: RBI=30 hand-curated, FinanceBench=50, MBPP=164, HumanEval=164. p&lt;0.001 (McNemar) on HumanEval.</a:t>
             </a:r>
           </a:p>
         </p:txBody>
@@ -9185,7 +9106,7 @@
                 </a:solidFill>
                 <a:latin typeface="Calibri"/>
               </a:rPr>
-              <a:t>Compliance · Internal research · Fraud — workloads frontier APIs cannot legally serve.</a:t>
+              <a:t>Validated: 100% on 30 hand-curated RBI Master Direction questions. Production-ready.</a:t>
             </a:r>
           </a:p>
         </p:txBody>
@@ -10942,8 +10863,8 @@
         </p:nvSpPr>
         <p:spPr>
           <a:xfrm>
-            <a:off x="914400" y="4754880"/>
-            <a:ext cx="10972800" cy="365760"/>
+            <a:off x="914400" y="4709160"/>
+            <a:ext cx="10972800" cy="320040"/>
           </a:xfrm>
           <a:prstGeom prst="rect">
             <a:avLst/>
@@ -10958,7 +10879,7 @@
           <a:p>
             <a:pPr algn="l"/>
             <a:r>
-              <a:rPr sz="1400" b="0">
+              <a:rPr sz="1300" b="0">
                 <a:solidFill>
                   <a:srgbClr val="FFFFFF"/>
                 </a:solidFill>
@@ -10977,8 +10898,8 @@
         </p:nvSpPr>
         <p:spPr>
           <a:xfrm>
-            <a:off x="914400" y="5074920"/>
-            <a:ext cx="10972800" cy="365760"/>
+            <a:off x="914400" y="4983480"/>
+            <a:ext cx="10972800" cy="320040"/>
           </a:xfrm>
           <a:prstGeom prst="rect">
             <a:avLst/>
@@ -10993,13 +10914,13 @@
           <a:p>
             <a:pPr algn="l"/>
             <a:r>
-              <a:rPr sz="1400" b="0">
+              <a:rPr sz="1300" b="0">
                 <a:solidFill>
                   <a:srgbClr val="FFFFFF"/>
                 </a:solidFill>
                 <a:latin typeface="Calibri"/>
               </a:rPr>
-              <a:t>12 routing techniques tested, 4 papers in pipeline (NeurIPS submission May 4).</a:t>
+              <a:t>12 routing techniques tested. 4 research artifacts in pipeline.</a:t>
             </a:r>
           </a:p>
         </p:txBody>
@@ -11012,8 +10933,8 @@
         </p:nvSpPr>
         <p:spPr>
           <a:xfrm>
-            <a:off x="914400" y="5394960"/>
-            <a:ext cx="10972800" cy="365760"/>
+            <a:off x="914400" y="5257800"/>
+            <a:ext cx="10972800" cy="320040"/>
           </a:xfrm>
           <a:prstGeom prst="rect">
             <a:avLst/>
@@ -11028,13 +10949,13 @@
           <a:p>
             <a:pPr algn="l"/>
             <a:r>
-              <a:rPr sz="1400" b="0">
+              <a:rPr sz="1300" b="0">
                 <a:solidFill>
                   <a:srgbClr val="FFFFFF"/>
                 </a:solidFill>
                 <a:latin typeface="Calibri"/>
               </a:rPr>
-              <a:t>20+ adapters trained across multiple base models.  Code Paradox: novel finding, n=200.</a:t>
+              <a:t>20+ adapters trained across base models.  Code Paradox: novel finding, n=200.</a:t>
             </a:r>
           </a:p>
         </p:txBody>
@@ -11047,8 +10968,8 @@
         </p:nvSpPr>
         <p:spPr>
           <a:xfrm>
-            <a:off x="914400" y="5715000"/>
-            <a:ext cx="10972800" cy="365760"/>
+            <a:off x="914400" y="5532120"/>
+            <a:ext cx="10972800" cy="320040"/>
           </a:xfrm>
           <a:prstGeom prst="rect">
             <a:avLst/>
@@ -11063,7 +10984,7 @@
           <a:p>
             <a:pPr algn="l"/>
             <a:r>
-              <a:rPr sz="1400" b="0">
+              <a:rPr sz="1300" b="0">
                 <a:solidFill>
                   <a:srgbClr val="FFFFFF"/>
                 </a:solidFill>
@@ -11077,6 +10998,41 @@
       <p:sp>
         <p:nvSpPr>
           <p:cNvPr id="29" name="TextBox 28"/>
+          <p:cNvSpPr txBox="1"/>
+          <p:nvPr/>
+        </p:nvSpPr>
+        <p:spPr>
+          <a:xfrm>
+            <a:off x="914400" y="5806440"/>
+            <a:ext cx="10972800" cy="320040"/>
+          </a:xfrm>
+          <a:prstGeom prst="rect">
+            <a:avLst/>
+          </a:prstGeom>
+          <a:noFill/>
+        </p:spPr>
+        <p:txBody>
+          <a:bodyPr wrap="square" lIns="0" rIns="0" tIns="0" bIns="0" anchor="t">
+            <a:spAutoFit/>
+          </a:bodyPr>
+          <a:lstStyle/>
+          <a:p>
+            <a:pPr algn="l"/>
+            <a:r>
+              <a:rPr sz="1300" b="1">
+                <a:solidFill>
+                  <a:srgbClr val="10E0A0"/>
+                </a:solidFill>
+                <a:latin typeface="Calibri"/>
+              </a:rPr>
+              <a:t>10+ BFSI conversations scheduled May 5–13 via college + Shark Tank network.</a:t>
+            </a:r>
+          </a:p>
+        </p:txBody>
+      </p:sp>
+      <p:sp>
+        <p:nvSpPr>
+          <p:cNvPr id="30" name="TextBox 29"/>
           <p:cNvSpPr txBox="1"/>
           <p:nvPr/>
         </p:nvSpPr>
@@ -11568,7 +11524,7 @@
                 </a:solidFill>
                 <a:latin typeface="Calibri"/>
               </a:rPr>
-              <a:t>First 3 BFSI design-partner deployments</a:t>
+              <a:t>First 3 BFSI design partners — pipeline open</a:t>
             </a:r>
           </a:p>
         </p:txBody>
